--- a/metro/metro-h03-reviews.pptx
+++ b/metro/metro-h03-reviews.pptx
@@ -3290,9 +3290,9 @@
                 <a:solidFill>
                   <a:srgbClr val="2D5BE3"/>
                 </a:solidFill>
-                <a:latin typeface="Space Grotesk"/>
-                <a:ea typeface="Space Grotesk"/>
-                <a:cs typeface="Space Grotesk"/>
+                <a:latin typeface="HK Grotesk"/>
+                <a:ea typeface="HK Grotesk"/>
+                <a:cs typeface="HK Grotesk"/>
               </a:rPr>
               <a:t>REVIEWS</a:t>
             </a:r>
@@ -3325,9 +3325,9 @@
                 <a:solidFill>
                   <a:srgbClr val="8A8A8C"/>
                 </a:solidFill>
-                <a:latin typeface="Space Grotesk"/>
-                <a:ea typeface="Space Grotesk"/>
-                <a:cs typeface="Space Grotesk"/>
+                <a:latin typeface="HK Grotesk"/>
+                <a:ea typeface="HK Grotesk"/>
+                <a:cs typeface="HK Grotesk"/>
               </a:rPr>
               <a:t>North &amp; Oak</a:t>
             </a:r>
